--- a/data-eng/decks/w3d5s4.pptx
+++ b/data-eng/decks/w3d5s4.pptx
@@ -15,6 +15,7 @@
     <p:sldId id="263" r:id="rId14"/>
     <p:sldId id="264" r:id="rId15"/>
     <p:sldId id="265" r:id="rId16"/>
+    <p:sldId id="266" r:id="rId17"/>
   </p:sldIdLst>
   <p:sldSz cx="18288000" cy="10287000" type="screen4x3"/>
   <p:notesSz cx="6858000" cy="9144000"/>
@@ -3099,7 +3100,7 @@
       <p:grpSpPr/>
       <p:sp>
         <p:nvSpPr>
-          <p:cNvPr id="2" name="Oval 1"/>
+          <p:cNvPr id="2" name="deckgen:decor"/>
           <p:cNvSpPr/>
           <p:nvPr/>
         </p:nvSpPr>
@@ -3129,7 +3130,7 @@
       </p:sp>
       <p:sp>
         <p:nvSpPr>
-          <p:cNvPr id="3" name="Oval 2"/>
+          <p:cNvPr id="3" name="deckgen:decor"/>
           <p:cNvSpPr/>
           <p:nvPr/>
         </p:nvSpPr>
@@ -3159,7 +3160,7 @@
       </p:sp>
       <p:sp>
         <p:nvSpPr>
-          <p:cNvPr id="4" name="Oval 3"/>
+          <p:cNvPr id="4" name="deckgen:decor"/>
           <p:cNvSpPr/>
           <p:nvPr/>
         </p:nvSpPr>
@@ -3189,7 +3190,7 @@
       </p:sp>
       <p:sp>
         <p:nvSpPr>
-          <p:cNvPr id="5" name="Rectangle 4"/>
+          <p:cNvPr id="5" name="deckgen:decor"/>
           <p:cNvSpPr/>
           <p:nvPr/>
         </p:nvSpPr>
@@ -3219,7 +3220,7 @@
       </p:sp>
       <p:sp>
         <p:nvSpPr>
-          <p:cNvPr id="6" name="Oval 5"/>
+          <p:cNvPr id="6" name="deckgen:decor"/>
           <p:cNvSpPr/>
           <p:nvPr/>
         </p:nvSpPr>
@@ -3249,7 +3250,7 @@
       </p:sp>
       <p:sp>
         <p:nvSpPr>
-          <p:cNvPr id="7" name="Oval 6"/>
+          <p:cNvPr id="7" name="deckgen:decor"/>
           <p:cNvSpPr/>
           <p:nvPr/>
         </p:nvSpPr>
@@ -3279,7 +3280,7 @@
       </p:sp>
       <p:sp>
         <p:nvSpPr>
-          <p:cNvPr id="8" name="Oval 7"/>
+          <p:cNvPr id="8" name="deckgen:decor"/>
           <p:cNvSpPr/>
           <p:nvPr/>
         </p:nvSpPr>
@@ -3309,7 +3310,7 @@
       </p:sp>
       <p:sp>
         <p:nvSpPr>
-          <p:cNvPr id="9" name="Oval 8"/>
+          <p:cNvPr id="9" name="deckgen:decor"/>
           <p:cNvSpPr/>
           <p:nvPr/>
         </p:nvSpPr>
@@ -3339,7 +3340,7 @@
       </p:sp>
       <p:sp>
         <p:nvSpPr>
-          <p:cNvPr id="10" name="Rectangle 9"/>
+          <p:cNvPr id="10" name="deckgen:decor"/>
           <p:cNvSpPr/>
           <p:nvPr/>
         </p:nvSpPr>
@@ -3599,7 +3600,1304 @@
       <p:grpSpPr/>
       <p:sp>
         <p:nvSpPr>
-          <p:cNvPr id="2" name="Oval 1"/>
+          <p:cNvPr id="2" name="deckgen:decor"/>
+          <p:cNvSpPr/>
+          <p:nvPr/>
+        </p:nvSpPr>
+        <p:spPr>
+          <a:xfrm>
+            <a:off x="15811500" y="8382000"/>
+            <a:ext cx="4953000" cy="4953000"/>
+          </a:xfrm>
+          <a:prstGeom prst="ellipse">
+            <a:avLst/>
+          </a:prstGeom>
+          <a:solidFill>
+            <a:srgbClr val="F3F6FC"/>
+          </a:solidFill>
+          <a:ln>
+            <a:noFill/>
+          </a:ln>
+          <a:effectLst/>
+        </p:spPr>
+        <p:txBody>
+          <a:bodyPr rtlCol="0" anchor="ctr" wrap="square"/>
+          <a:lstStyle/>
+          <a:p>
+            <a:pPr algn="ctr"/>
+          </a:p>
+        </p:txBody>
+      </p:sp>
+      <p:sp>
+        <p:nvSpPr>
+          <p:cNvPr id="3" name="deckgen:decor"/>
+          <p:cNvSpPr/>
+          <p:nvPr/>
+        </p:nvSpPr>
+        <p:spPr>
+          <a:xfrm>
+            <a:off x="16859250" y="9429750"/>
+            <a:ext cx="2857500" cy="2857500"/>
+          </a:xfrm>
+          <a:prstGeom prst="ellipse">
+            <a:avLst/>
+          </a:prstGeom>
+          <a:solidFill>
+            <a:srgbClr val="FFFFFF"/>
+          </a:solidFill>
+          <a:ln>
+            <a:noFill/>
+          </a:ln>
+          <a:effectLst/>
+        </p:spPr>
+        <p:txBody>
+          <a:bodyPr rtlCol="0" anchor="ctr" wrap="square"/>
+          <a:lstStyle/>
+          <a:p>
+            <a:pPr algn="ctr"/>
+          </a:p>
+        </p:txBody>
+      </p:sp>
+      <p:sp>
+        <p:nvSpPr>
+          <p:cNvPr id="4" name="deckgen:decor"/>
+          <p:cNvSpPr/>
+          <p:nvPr/>
+        </p:nvSpPr>
+        <p:spPr>
+          <a:xfrm>
+            <a:off x="-1428750" y="1428750"/>
+            <a:ext cx="2857500" cy="2857500"/>
+          </a:xfrm>
+          <a:prstGeom prst="ellipse">
+            <a:avLst/>
+          </a:prstGeom>
+          <a:solidFill>
+            <a:srgbClr val="F7F8FA"/>
+          </a:solidFill>
+          <a:ln>
+            <a:noFill/>
+          </a:ln>
+          <a:effectLst/>
+        </p:spPr>
+        <p:txBody>
+          <a:bodyPr rtlCol="0" anchor="ctr" wrap="square"/>
+          <a:lstStyle/>
+          <a:p>
+            <a:pPr algn="ctr"/>
+          </a:p>
+        </p:txBody>
+      </p:sp>
+      <p:sp>
+        <p:nvSpPr>
+          <p:cNvPr id="5" name="TextBox 4"/>
+          <p:cNvSpPr txBox="1"/>
+          <p:nvPr/>
+        </p:nvSpPr>
+        <p:spPr>
+          <a:xfrm>
+            <a:off x="1143000" y="838200"/>
+            <a:ext cx="16002000" cy="342900"/>
+          </a:xfrm>
+          <a:prstGeom prst="rect">
+            <a:avLst/>
+          </a:prstGeom>
+          <a:noFill/>
+        </p:spPr>
+        <p:txBody>
+          <a:bodyPr wrap="square" lIns="0" rIns="0" tIns="0" bIns="0" anchor="t">
+            <a:spAutoFit/>
+          </a:bodyPr>
+          <a:lstStyle/>
+          <a:p>
+            <a:pPr algn="l">
+              <a:lnSpc>
+                <a:spcPct val="100000"/>
+              </a:lnSpc>
+            </a:pPr>
+            <a:r>
+              <a:rPr sz="1950" b="1" spc="160">
+                <a:solidFill>
+                  <a:srgbClr val="1E5BC6"/>
+                </a:solidFill>
+                <a:latin typeface="Pretendard"/>
+                <a:ea typeface="Pretendard"/>
+                <a:cs typeface="Pretendard"/>
+              </a:rPr>
+              <a:t>4-1 준비 — 도커로 돌아갑니다</a:t>
+            </a:r>
+          </a:p>
+        </p:txBody>
+      </p:sp>
+      <p:sp>
+        <p:nvSpPr>
+          <p:cNvPr id="6" name="TextBox 5"/>
+          <p:cNvSpPr txBox="1"/>
+          <p:nvPr/>
+        </p:nvSpPr>
+        <p:spPr>
+          <a:xfrm>
+            <a:off x="1143000" y="1162050"/>
+            <a:ext cx="16002000" cy="762000"/>
+          </a:xfrm>
+          <a:prstGeom prst="rect">
+            <a:avLst/>
+          </a:prstGeom>
+          <a:noFill/>
+        </p:spPr>
+        <p:txBody>
+          <a:bodyPr wrap="square" lIns="0" rIns="0" tIns="0" bIns="0" anchor="t">
+            <a:spAutoFit/>
+          </a:bodyPr>
+          <a:lstStyle/>
+          <a:p>
+            <a:pPr algn="l">
+              <a:lnSpc>
+                <a:spcPct val="100000"/>
+              </a:lnSpc>
+            </a:pPr>
+            <a:r>
+              <a:rPr sz="5100" b="1">
+                <a:solidFill>
+                  <a:srgbClr val="0D2B5E"/>
+                </a:solidFill>
+                <a:latin typeface="Pretendard"/>
+                <a:ea typeface="Pretendard"/>
+                <a:cs typeface="Pretendard"/>
+              </a:rPr>
+              <a:t>도커 다시 켜기 — 각자 운영체제대로</a:t>
+            </a:r>
+          </a:p>
+        </p:txBody>
+      </p:sp>
+      <p:sp>
+        <p:nvSpPr>
+          <p:cNvPr id="7" name="Rectangle 6"/>
+          <p:cNvSpPr/>
+          <p:nvPr/>
+        </p:nvSpPr>
+        <p:spPr>
+          <a:xfrm>
+            <a:off x="1143000" y="2038350"/>
+            <a:ext cx="16002000" cy="28575"/>
+          </a:xfrm>
+          <a:prstGeom prst="rect">
+            <a:avLst/>
+          </a:prstGeom>
+          <a:solidFill>
+            <a:srgbClr val="0D2B5E"/>
+          </a:solidFill>
+          <a:ln>
+            <a:noFill/>
+          </a:ln>
+          <a:effectLst/>
+        </p:spPr>
+        <p:txBody>
+          <a:bodyPr rtlCol="0" anchor="ctr" wrap="square"/>
+          <a:lstStyle/>
+          <a:p>
+            <a:pPr algn="ctr"/>
+          </a:p>
+        </p:txBody>
+      </p:sp>
+      <p:sp>
+        <p:nvSpPr>
+          <p:cNvPr id="8" name="Rectangle 7"/>
+          <p:cNvSpPr/>
+          <p:nvPr/>
+        </p:nvSpPr>
+        <p:spPr>
+          <a:xfrm>
+            <a:off x="1143000" y="2781300"/>
+            <a:ext cx="4122420" cy="590550"/>
+          </a:xfrm>
+          <a:prstGeom prst="rect">
+            <a:avLst/>
+          </a:prstGeom>
+          <a:solidFill>
+            <a:srgbClr val="0D2B5E"/>
+          </a:solidFill>
+          <a:ln>
+            <a:noFill/>
+          </a:ln>
+          <a:effectLst/>
+        </p:spPr>
+        <p:txBody>
+          <a:bodyPr rtlCol="0" anchor="ctr" wrap="square"/>
+          <a:lstStyle/>
+          <a:p>
+            <a:pPr algn="ctr"/>
+          </a:p>
+        </p:txBody>
+      </p:sp>
+      <p:sp>
+        <p:nvSpPr>
+          <p:cNvPr id="9" name="TextBox 8"/>
+          <p:cNvSpPr txBox="1"/>
+          <p:nvPr/>
+        </p:nvSpPr>
+        <p:spPr>
+          <a:xfrm>
+            <a:off x="1143000" y="2781300"/>
+            <a:ext cx="4122420" cy="590550"/>
+          </a:xfrm>
+          <a:prstGeom prst="rect">
+            <a:avLst/>
+          </a:prstGeom>
+          <a:noFill/>
+        </p:spPr>
+        <p:txBody>
+          <a:bodyPr wrap="square" lIns="0" rIns="0" tIns="0" bIns="0" anchor="ctr">
+            <a:spAutoFit/>
+          </a:bodyPr>
+          <a:lstStyle/>
+          <a:p>
+            <a:pPr algn="ctr">
+              <a:lnSpc>
+                <a:spcPct val="100000"/>
+              </a:lnSpc>
+            </a:pPr>
+            <a:r>
+              <a:rPr sz="2025" b="1">
+                <a:solidFill>
+                  <a:srgbClr val="FFFFFF"/>
+                </a:solidFill>
+                <a:latin typeface="Pretendard"/>
+                <a:ea typeface="Pretendard"/>
+                <a:cs typeface="Pretendard"/>
+              </a:rPr>
+              <a:t>운영체제</a:t>
+            </a:r>
+          </a:p>
+        </p:txBody>
+      </p:sp>
+      <p:sp>
+        <p:nvSpPr>
+          <p:cNvPr id="10" name="Rectangle 9"/>
+          <p:cNvSpPr/>
+          <p:nvPr/>
+        </p:nvSpPr>
+        <p:spPr>
+          <a:xfrm>
+            <a:off x="5303520" y="2781300"/>
+            <a:ext cx="5402580" cy="590550"/>
+          </a:xfrm>
+          <a:prstGeom prst="rect">
+            <a:avLst/>
+          </a:prstGeom>
+          <a:solidFill>
+            <a:srgbClr val="1E5BC6"/>
+          </a:solidFill>
+          <a:ln>
+            <a:noFill/>
+          </a:ln>
+          <a:effectLst/>
+        </p:spPr>
+        <p:txBody>
+          <a:bodyPr rtlCol="0" anchor="ctr" wrap="square"/>
+          <a:lstStyle/>
+          <a:p>
+            <a:pPr algn="ctr"/>
+          </a:p>
+        </p:txBody>
+      </p:sp>
+      <p:sp>
+        <p:nvSpPr>
+          <p:cNvPr id="11" name="TextBox 10"/>
+          <p:cNvSpPr txBox="1"/>
+          <p:nvPr/>
+        </p:nvSpPr>
+        <p:spPr>
+          <a:xfrm>
+            <a:off x="5303520" y="2781300"/>
+            <a:ext cx="5402580" cy="590550"/>
+          </a:xfrm>
+          <a:prstGeom prst="rect">
+            <a:avLst/>
+          </a:prstGeom>
+          <a:noFill/>
+        </p:spPr>
+        <p:txBody>
+          <a:bodyPr wrap="square" lIns="0" rIns="0" tIns="0" bIns="0" anchor="ctr">
+            <a:spAutoFit/>
+          </a:bodyPr>
+          <a:lstStyle/>
+          <a:p>
+            <a:pPr algn="ctr">
+              <a:lnSpc>
+                <a:spcPct val="100000"/>
+              </a:lnSpc>
+            </a:pPr>
+            <a:r>
+              <a:rPr sz="2025" b="1">
+                <a:solidFill>
+                  <a:srgbClr val="FFFFFF"/>
+                </a:solidFill>
+                <a:latin typeface="Pretendard"/>
+                <a:ea typeface="Pretendard"/>
+                <a:cs typeface="Pretendard"/>
+              </a:rPr>
+              <a:t>켜기</a:t>
+            </a:r>
+          </a:p>
+        </p:txBody>
+      </p:sp>
+      <p:sp>
+        <p:nvSpPr>
+          <p:cNvPr id="12" name="Rectangle 11"/>
+          <p:cNvSpPr/>
+          <p:nvPr/>
+        </p:nvSpPr>
+        <p:spPr>
+          <a:xfrm>
+            <a:off x="10744200" y="2781300"/>
+            <a:ext cx="6400800" cy="590550"/>
+          </a:xfrm>
+          <a:prstGeom prst="rect">
+            <a:avLst/>
+          </a:prstGeom>
+          <a:solidFill>
+            <a:srgbClr val="1E5BC6"/>
+          </a:solidFill>
+          <a:ln>
+            <a:noFill/>
+          </a:ln>
+          <a:effectLst/>
+        </p:spPr>
+        <p:txBody>
+          <a:bodyPr rtlCol="0" anchor="ctr" wrap="square"/>
+          <a:lstStyle/>
+          <a:p>
+            <a:pPr algn="ctr"/>
+          </a:p>
+        </p:txBody>
+      </p:sp>
+      <p:sp>
+        <p:nvSpPr>
+          <p:cNvPr id="13" name="TextBox 12"/>
+          <p:cNvSpPr txBox="1"/>
+          <p:nvPr/>
+        </p:nvSpPr>
+        <p:spPr>
+          <a:xfrm>
+            <a:off x="10744200" y="2781300"/>
+            <a:ext cx="6400800" cy="590550"/>
+          </a:xfrm>
+          <a:prstGeom prst="rect">
+            <a:avLst/>
+          </a:prstGeom>
+          <a:noFill/>
+        </p:spPr>
+        <p:txBody>
+          <a:bodyPr wrap="square" lIns="0" rIns="0" tIns="0" bIns="0" anchor="ctr">
+            <a:spAutoFit/>
+          </a:bodyPr>
+          <a:lstStyle/>
+          <a:p>
+            <a:pPr algn="ctr">
+              <a:lnSpc>
+                <a:spcPct val="100000"/>
+              </a:lnSpc>
+            </a:pPr>
+            <a:r>
+              <a:rPr sz="2025" b="1">
+                <a:solidFill>
+                  <a:srgbClr val="FFFFFF"/>
+                </a:solidFill>
+                <a:latin typeface="Pretendard"/>
+                <a:ea typeface="Pretendard"/>
+                <a:cs typeface="Pretendard"/>
+              </a:rPr>
+              <a:t>확인할 것</a:t>
+            </a:r>
+          </a:p>
+        </p:txBody>
+      </p:sp>
+      <p:sp>
+        <p:nvSpPr>
+          <p:cNvPr id="14" name="Rounded Rectangle 13"/>
+          <p:cNvSpPr/>
+          <p:nvPr/>
+        </p:nvSpPr>
+        <p:spPr>
+          <a:xfrm>
+            <a:off x="1143000" y="3448050"/>
+            <a:ext cx="4122420" cy="647700"/>
+          </a:xfrm>
+          <a:prstGeom prst="roundRect">
+            <a:avLst>
+              <a:gd name="adj" fmla="val 5882"/>
+            </a:avLst>
+          </a:prstGeom>
+          <a:solidFill>
+            <a:srgbClr val="EDF3FD"/>
+          </a:solidFill>
+          <a:ln w="9525">
+            <a:solidFill>
+              <a:srgbClr val="BFD3F5"/>
+            </a:solidFill>
+          </a:ln>
+          <a:effectLst/>
+        </p:spPr>
+        <p:txBody>
+          <a:bodyPr rtlCol="0" anchor="ctr" wrap="square"/>
+          <a:lstStyle/>
+          <a:p>
+            <a:pPr algn="ctr"/>
+          </a:p>
+        </p:txBody>
+      </p:sp>
+      <p:sp>
+        <p:nvSpPr>
+          <p:cNvPr id="15" name="TextBox 14"/>
+          <p:cNvSpPr txBox="1"/>
+          <p:nvPr/>
+        </p:nvSpPr>
+        <p:spPr>
+          <a:xfrm>
+            <a:off x="1238250" y="3448050"/>
+            <a:ext cx="3931920" cy="647700"/>
+          </a:xfrm>
+          <a:prstGeom prst="rect">
+            <a:avLst/>
+          </a:prstGeom>
+          <a:noFill/>
+        </p:spPr>
+        <p:txBody>
+          <a:bodyPr wrap="square" lIns="0" rIns="0" tIns="0" bIns="0" anchor="ctr">
+            <a:spAutoFit/>
+          </a:bodyPr>
+          <a:lstStyle/>
+          <a:p>
+            <a:pPr algn="l">
+              <a:lnSpc>
+                <a:spcPct val="115000"/>
+              </a:lnSpc>
+            </a:pPr>
+            <a:r>
+              <a:rPr sz="1875" b="1">
+                <a:solidFill>
+                  <a:srgbClr val="0D2B5E"/>
+                </a:solidFill>
+                <a:latin typeface="Pretendard"/>
+                <a:ea typeface="Pretendard"/>
+                <a:cs typeface="Pretendard"/>
+              </a:rPr>
+              <a:t>Windows (WSL2)</a:t>
+            </a:r>
+          </a:p>
+        </p:txBody>
+      </p:sp>
+      <p:sp>
+        <p:nvSpPr>
+          <p:cNvPr id="16" name="Rounded Rectangle 15"/>
+          <p:cNvSpPr/>
+          <p:nvPr/>
+        </p:nvSpPr>
+        <p:spPr>
+          <a:xfrm>
+            <a:off x="5303520" y="3448050"/>
+            <a:ext cx="5402580" cy="647700"/>
+          </a:xfrm>
+          <a:prstGeom prst="roundRect">
+            <a:avLst>
+              <a:gd name="adj" fmla="val 5882"/>
+            </a:avLst>
+          </a:prstGeom>
+          <a:solidFill>
+            <a:srgbClr val="FAFBFD"/>
+          </a:solidFill>
+          <a:ln w="9525">
+            <a:solidFill>
+              <a:srgbClr val="DCE1E8"/>
+            </a:solidFill>
+          </a:ln>
+          <a:effectLst/>
+        </p:spPr>
+        <p:txBody>
+          <a:bodyPr rtlCol="0" anchor="ctr" wrap="square"/>
+          <a:lstStyle/>
+          <a:p>
+            <a:pPr algn="ctr"/>
+          </a:p>
+        </p:txBody>
+      </p:sp>
+      <p:sp>
+        <p:nvSpPr>
+          <p:cNvPr id="17" name="TextBox 16"/>
+          <p:cNvSpPr txBox="1"/>
+          <p:nvPr/>
+        </p:nvSpPr>
+        <p:spPr>
+          <a:xfrm>
+            <a:off x="5398770" y="3448050"/>
+            <a:ext cx="5212080" cy="647700"/>
+          </a:xfrm>
+          <a:prstGeom prst="rect">
+            <a:avLst/>
+          </a:prstGeom>
+          <a:noFill/>
+        </p:spPr>
+        <p:txBody>
+          <a:bodyPr wrap="square" lIns="0" rIns="0" tIns="0" bIns="0" anchor="ctr">
+            <a:spAutoFit/>
+          </a:bodyPr>
+          <a:lstStyle/>
+          <a:p>
+            <a:pPr algn="ctr">
+              <a:lnSpc>
+                <a:spcPct val="115000"/>
+              </a:lnSpc>
+            </a:pPr>
+            <a:r>
+              <a:rPr sz="1875" b="0">
+                <a:solidFill>
+                  <a:srgbClr val="3D3D3D"/>
+                </a:solidFill>
+                <a:latin typeface="Pretendard"/>
+                <a:ea typeface="Pretendard"/>
+                <a:cs typeface="Pretendard"/>
+              </a:rPr>
+              <a:t>Docker Desktop 실행</a:t>
+            </a:r>
+          </a:p>
+        </p:txBody>
+      </p:sp>
+      <p:sp>
+        <p:nvSpPr>
+          <p:cNvPr id="18" name="Rounded Rectangle 17"/>
+          <p:cNvSpPr/>
+          <p:nvPr/>
+        </p:nvSpPr>
+        <p:spPr>
+          <a:xfrm>
+            <a:off x="10744200" y="3448050"/>
+            <a:ext cx="6400800" cy="647700"/>
+          </a:xfrm>
+          <a:prstGeom prst="roundRect">
+            <a:avLst>
+              <a:gd name="adj" fmla="val 5882"/>
+            </a:avLst>
+          </a:prstGeom>
+          <a:solidFill>
+            <a:srgbClr val="FAFBFD"/>
+          </a:solidFill>
+          <a:ln w="9525">
+            <a:solidFill>
+              <a:srgbClr val="DCE1E8"/>
+            </a:solidFill>
+          </a:ln>
+          <a:effectLst/>
+        </p:spPr>
+        <p:txBody>
+          <a:bodyPr rtlCol="0" anchor="ctr" wrap="square"/>
+          <a:lstStyle/>
+          <a:p>
+            <a:pPr algn="ctr"/>
+          </a:p>
+        </p:txBody>
+      </p:sp>
+      <p:sp>
+        <p:nvSpPr>
+          <p:cNvPr id="19" name="TextBox 18"/>
+          <p:cNvSpPr txBox="1"/>
+          <p:nvPr/>
+        </p:nvSpPr>
+        <p:spPr>
+          <a:xfrm>
+            <a:off x="10839450" y="3448050"/>
+            <a:ext cx="6210300" cy="647700"/>
+          </a:xfrm>
+          <a:prstGeom prst="rect">
+            <a:avLst/>
+          </a:prstGeom>
+          <a:noFill/>
+        </p:spPr>
+        <p:txBody>
+          <a:bodyPr wrap="square" lIns="0" rIns="0" tIns="0" bIns="0" anchor="ctr">
+            <a:spAutoFit/>
+          </a:bodyPr>
+          <a:lstStyle/>
+          <a:p>
+            <a:pPr algn="ctr">
+              <a:lnSpc>
+                <a:spcPct val="115000"/>
+              </a:lnSpc>
+            </a:pPr>
+            <a:r>
+              <a:rPr sz="1875" b="0">
+                <a:solidFill>
+                  <a:srgbClr val="3D3D3D"/>
+                </a:solidFill>
+                <a:latin typeface="Pretendard"/>
+                <a:ea typeface="Pretendard"/>
+                <a:cs typeface="Pretendard"/>
+              </a:rPr>
+              <a:t>고래 아이콘 멈춤</a:t>
+            </a:r>
+          </a:p>
+          <a:p>
+            <a:pPr algn="ctr">
+              <a:lnSpc>
+                <a:spcPct val="115000"/>
+              </a:lnSpc>
+            </a:pPr>
+            <a:r>
+              <a:rPr sz="1875" b="0">
+                <a:solidFill>
+                  <a:srgbClr val="3D3D3D"/>
+                </a:solidFill>
+                <a:latin typeface="Pretendard"/>
+                <a:ea typeface="Pretendard"/>
+                <a:cs typeface="Pretendard"/>
+              </a:rPr>
+              <a:t>WSL Integration Ubuntu</a:t>
+            </a:r>
+          </a:p>
+        </p:txBody>
+      </p:sp>
+      <p:sp>
+        <p:nvSpPr>
+          <p:cNvPr id="20" name="Rounded Rectangle 19"/>
+          <p:cNvSpPr/>
+          <p:nvPr/>
+        </p:nvSpPr>
+        <p:spPr>
+          <a:xfrm>
+            <a:off x="1143000" y="4171950"/>
+            <a:ext cx="4122420" cy="647700"/>
+          </a:xfrm>
+          <a:prstGeom prst="roundRect">
+            <a:avLst>
+              <a:gd name="adj" fmla="val 5882"/>
+            </a:avLst>
+          </a:prstGeom>
+          <a:solidFill>
+            <a:srgbClr val="EDF3FD"/>
+          </a:solidFill>
+          <a:ln w="9525">
+            <a:solidFill>
+              <a:srgbClr val="BFD3F5"/>
+            </a:solidFill>
+          </a:ln>
+          <a:effectLst/>
+        </p:spPr>
+        <p:txBody>
+          <a:bodyPr rtlCol="0" anchor="ctr" wrap="square"/>
+          <a:lstStyle/>
+          <a:p>
+            <a:pPr algn="ctr"/>
+          </a:p>
+        </p:txBody>
+      </p:sp>
+      <p:sp>
+        <p:nvSpPr>
+          <p:cNvPr id="21" name="TextBox 20"/>
+          <p:cNvSpPr txBox="1"/>
+          <p:nvPr/>
+        </p:nvSpPr>
+        <p:spPr>
+          <a:xfrm>
+            <a:off x="1238250" y="4171950"/>
+            <a:ext cx="3931920" cy="647700"/>
+          </a:xfrm>
+          <a:prstGeom prst="rect">
+            <a:avLst/>
+          </a:prstGeom>
+          <a:noFill/>
+        </p:spPr>
+        <p:txBody>
+          <a:bodyPr wrap="square" lIns="0" rIns="0" tIns="0" bIns="0" anchor="ctr">
+            <a:spAutoFit/>
+          </a:bodyPr>
+          <a:lstStyle/>
+          <a:p>
+            <a:pPr algn="l">
+              <a:lnSpc>
+                <a:spcPct val="115000"/>
+              </a:lnSpc>
+            </a:pPr>
+            <a:r>
+              <a:rPr sz="1875" b="1">
+                <a:solidFill>
+                  <a:srgbClr val="0D2B5E"/>
+                </a:solidFill>
+                <a:latin typeface="Pretendard"/>
+                <a:ea typeface="Pretendard"/>
+                <a:cs typeface="Pretendard"/>
+              </a:rPr>
+              <a:t>macOS</a:t>
+            </a:r>
+          </a:p>
+        </p:txBody>
+      </p:sp>
+      <p:sp>
+        <p:nvSpPr>
+          <p:cNvPr id="22" name="Rounded Rectangle 21"/>
+          <p:cNvSpPr/>
+          <p:nvPr/>
+        </p:nvSpPr>
+        <p:spPr>
+          <a:xfrm>
+            <a:off x="5303520" y="4171950"/>
+            <a:ext cx="5402580" cy="647700"/>
+          </a:xfrm>
+          <a:prstGeom prst="roundRect">
+            <a:avLst>
+              <a:gd name="adj" fmla="val 5882"/>
+            </a:avLst>
+          </a:prstGeom>
+          <a:solidFill>
+            <a:srgbClr val="FAFBFD"/>
+          </a:solidFill>
+          <a:ln w="9525">
+            <a:solidFill>
+              <a:srgbClr val="DCE1E8"/>
+            </a:solidFill>
+          </a:ln>
+          <a:effectLst/>
+        </p:spPr>
+        <p:txBody>
+          <a:bodyPr rtlCol="0" anchor="ctr" wrap="square"/>
+          <a:lstStyle/>
+          <a:p>
+            <a:pPr algn="ctr"/>
+          </a:p>
+        </p:txBody>
+      </p:sp>
+      <p:sp>
+        <p:nvSpPr>
+          <p:cNvPr id="23" name="TextBox 22"/>
+          <p:cNvSpPr txBox="1"/>
+          <p:nvPr/>
+        </p:nvSpPr>
+        <p:spPr>
+          <a:xfrm>
+            <a:off x="5398770" y="4171950"/>
+            <a:ext cx="5212080" cy="647700"/>
+          </a:xfrm>
+          <a:prstGeom prst="rect">
+            <a:avLst/>
+          </a:prstGeom>
+          <a:noFill/>
+        </p:spPr>
+        <p:txBody>
+          <a:bodyPr wrap="square" lIns="0" rIns="0" tIns="0" bIns="0" anchor="ctr">
+            <a:spAutoFit/>
+          </a:bodyPr>
+          <a:lstStyle/>
+          <a:p>
+            <a:pPr algn="ctr">
+              <a:lnSpc>
+                <a:spcPct val="115000"/>
+              </a:lnSpc>
+            </a:pPr>
+            <a:r>
+              <a:rPr sz="1875" b="0">
+                <a:solidFill>
+                  <a:srgbClr val="3D3D3D"/>
+                </a:solidFill>
+                <a:latin typeface="Pretendard"/>
+                <a:ea typeface="Pretendard"/>
+                <a:cs typeface="Pretendard"/>
+              </a:rPr>
+              <a:t>Docker Desktop 실행</a:t>
+            </a:r>
+          </a:p>
+        </p:txBody>
+      </p:sp>
+      <p:sp>
+        <p:nvSpPr>
+          <p:cNvPr id="24" name="Rounded Rectangle 23"/>
+          <p:cNvSpPr/>
+          <p:nvPr/>
+        </p:nvSpPr>
+        <p:spPr>
+          <a:xfrm>
+            <a:off x="10744200" y="4171950"/>
+            <a:ext cx="6400800" cy="647700"/>
+          </a:xfrm>
+          <a:prstGeom prst="roundRect">
+            <a:avLst>
+              <a:gd name="adj" fmla="val 5882"/>
+            </a:avLst>
+          </a:prstGeom>
+          <a:solidFill>
+            <a:srgbClr val="FAFBFD"/>
+          </a:solidFill>
+          <a:ln w="9525">
+            <a:solidFill>
+              <a:srgbClr val="DCE1E8"/>
+            </a:solidFill>
+          </a:ln>
+          <a:effectLst/>
+        </p:spPr>
+        <p:txBody>
+          <a:bodyPr rtlCol="0" anchor="ctr" wrap="square"/>
+          <a:lstStyle/>
+          <a:p>
+            <a:pPr algn="ctr"/>
+          </a:p>
+        </p:txBody>
+      </p:sp>
+      <p:sp>
+        <p:nvSpPr>
+          <p:cNvPr id="25" name="TextBox 24"/>
+          <p:cNvSpPr txBox="1"/>
+          <p:nvPr/>
+        </p:nvSpPr>
+        <p:spPr>
+          <a:xfrm>
+            <a:off x="10839450" y="4171950"/>
+            <a:ext cx="6210300" cy="647700"/>
+          </a:xfrm>
+          <a:prstGeom prst="rect">
+            <a:avLst/>
+          </a:prstGeom>
+          <a:noFill/>
+        </p:spPr>
+        <p:txBody>
+          <a:bodyPr wrap="square" lIns="0" rIns="0" tIns="0" bIns="0" anchor="ctr">
+            <a:spAutoFit/>
+          </a:bodyPr>
+          <a:lstStyle/>
+          <a:p>
+            <a:pPr algn="ctr">
+              <a:lnSpc>
+                <a:spcPct val="115000"/>
+              </a:lnSpc>
+            </a:pPr>
+            <a:r>
+              <a:rPr sz="1875" b="0">
+                <a:solidFill>
+                  <a:srgbClr val="3D3D3D"/>
+                </a:solidFill>
+                <a:latin typeface="Pretendard"/>
+                <a:ea typeface="Pretendard"/>
+                <a:cs typeface="Pretendard"/>
+              </a:rPr>
+              <a:t>메뉴 막대 고래 멈춤</a:t>
+            </a:r>
+          </a:p>
+        </p:txBody>
+      </p:sp>
+      <p:sp>
+        <p:nvSpPr>
+          <p:cNvPr id="26" name="Rounded Rectangle 25"/>
+          <p:cNvSpPr/>
+          <p:nvPr/>
+        </p:nvSpPr>
+        <p:spPr>
+          <a:xfrm>
+            <a:off x="1143000" y="4895850"/>
+            <a:ext cx="4122420" cy="647700"/>
+          </a:xfrm>
+          <a:prstGeom prst="roundRect">
+            <a:avLst>
+              <a:gd name="adj" fmla="val 5882"/>
+            </a:avLst>
+          </a:prstGeom>
+          <a:solidFill>
+            <a:srgbClr val="EDF3FD"/>
+          </a:solidFill>
+          <a:ln w="9525">
+            <a:solidFill>
+              <a:srgbClr val="BFD3F5"/>
+            </a:solidFill>
+          </a:ln>
+          <a:effectLst/>
+        </p:spPr>
+        <p:txBody>
+          <a:bodyPr rtlCol="0" anchor="ctr" wrap="square"/>
+          <a:lstStyle/>
+          <a:p>
+            <a:pPr algn="ctr"/>
+          </a:p>
+        </p:txBody>
+      </p:sp>
+      <p:sp>
+        <p:nvSpPr>
+          <p:cNvPr id="27" name="TextBox 26"/>
+          <p:cNvSpPr txBox="1"/>
+          <p:nvPr/>
+        </p:nvSpPr>
+        <p:spPr>
+          <a:xfrm>
+            <a:off x="1238250" y="4895850"/>
+            <a:ext cx="3931920" cy="647700"/>
+          </a:xfrm>
+          <a:prstGeom prst="rect">
+            <a:avLst/>
+          </a:prstGeom>
+          <a:noFill/>
+        </p:spPr>
+        <p:txBody>
+          <a:bodyPr wrap="square" lIns="0" rIns="0" tIns="0" bIns="0" anchor="ctr">
+            <a:spAutoFit/>
+          </a:bodyPr>
+          <a:lstStyle/>
+          <a:p>
+            <a:pPr algn="l">
+              <a:lnSpc>
+                <a:spcPct val="115000"/>
+              </a:lnSpc>
+            </a:pPr>
+            <a:r>
+              <a:rPr sz="1875" b="1">
+                <a:solidFill>
+                  <a:srgbClr val="0D2B5E"/>
+                </a:solidFill>
+                <a:latin typeface="Pretendard"/>
+                <a:ea typeface="Pretendard"/>
+                <a:cs typeface="Pretendard"/>
+              </a:rPr>
+              <a:t>리눅스 (Ubuntu)</a:t>
+            </a:r>
+          </a:p>
+        </p:txBody>
+      </p:sp>
+      <p:sp>
+        <p:nvSpPr>
+          <p:cNvPr id="28" name="Rounded Rectangle 27"/>
+          <p:cNvSpPr/>
+          <p:nvPr/>
+        </p:nvSpPr>
+        <p:spPr>
+          <a:xfrm>
+            <a:off x="5303520" y="4895850"/>
+            <a:ext cx="5402580" cy="647700"/>
+          </a:xfrm>
+          <a:prstGeom prst="roundRect">
+            <a:avLst>
+              <a:gd name="adj" fmla="val 5882"/>
+            </a:avLst>
+          </a:prstGeom>
+          <a:solidFill>
+            <a:srgbClr val="FAFBFD"/>
+          </a:solidFill>
+          <a:ln w="9525">
+            <a:solidFill>
+              <a:srgbClr val="DCE1E8"/>
+            </a:solidFill>
+          </a:ln>
+          <a:effectLst/>
+        </p:spPr>
+        <p:txBody>
+          <a:bodyPr rtlCol="0" anchor="ctr" wrap="square"/>
+          <a:lstStyle/>
+          <a:p>
+            <a:pPr algn="ctr"/>
+          </a:p>
+        </p:txBody>
+      </p:sp>
+      <p:sp>
+        <p:nvSpPr>
+          <p:cNvPr id="29" name="TextBox 28"/>
+          <p:cNvSpPr txBox="1"/>
+          <p:nvPr/>
+        </p:nvSpPr>
+        <p:spPr>
+          <a:xfrm>
+            <a:off x="5398770" y="4895850"/>
+            <a:ext cx="5212080" cy="647700"/>
+          </a:xfrm>
+          <a:prstGeom prst="rect">
+            <a:avLst/>
+          </a:prstGeom>
+          <a:noFill/>
+        </p:spPr>
+        <p:txBody>
+          <a:bodyPr wrap="square" lIns="0" rIns="0" tIns="0" bIns="0" anchor="ctr">
+            <a:spAutoFit/>
+          </a:bodyPr>
+          <a:lstStyle/>
+          <a:p>
+            <a:pPr algn="ctr">
+              <a:lnSpc>
+                <a:spcPct val="115000"/>
+              </a:lnSpc>
+            </a:pPr>
+            <a:r>
+              <a:rPr sz="1875" b="0">
+                <a:solidFill>
+                  <a:srgbClr val="3D3D3D"/>
+                </a:solidFill>
+                <a:latin typeface="Pretendard"/>
+                <a:ea typeface="Pretendard"/>
+                <a:cs typeface="Pretendard"/>
+              </a:rPr>
+              <a:t>sudo systemctl</a:t>
+            </a:r>
+          </a:p>
+          <a:p>
+            <a:pPr algn="ctr">
+              <a:lnSpc>
+                <a:spcPct val="115000"/>
+              </a:lnSpc>
+            </a:pPr>
+            <a:r>
+              <a:rPr sz="1875" b="0">
+                <a:solidFill>
+                  <a:srgbClr val="3D3D3D"/>
+                </a:solidFill>
+                <a:latin typeface="Pretendard"/>
+                <a:ea typeface="Pretendard"/>
+                <a:cs typeface="Pretendard"/>
+              </a:rPr>
+              <a:t>enable --now docker</a:t>
+            </a:r>
+          </a:p>
+        </p:txBody>
+      </p:sp>
+      <p:sp>
+        <p:nvSpPr>
+          <p:cNvPr id="30" name="Rounded Rectangle 29"/>
+          <p:cNvSpPr/>
+          <p:nvPr/>
+        </p:nvSpPr>
+        <p:spPr>
+          <a:xfrm>
+            <a:off x="10744200" y="4895850"/>
+            <a:ext cx="6400800" cy="647700"/>
+          </a:xfrm>
+          <a:prstGeom prst="roundRect">
+            <a:avLst>
+              <a:gd name="adj" fmla="val 5882"/>
+            </a:avLst>
+          </a:prstGeom>
+          <a:solidFill>
+            <a:srgbClr val="FAFBFD"/>
+          </a:solidFill>
+          <a:ln w="9525">
+            <a:solidFill>
+              <a:srgbClr val="DCE1E8"/>
+            </a:solidFill>
+          </a:ln>
+          <a:effectLst/>
+        </p:spPr>
+        <p:txBody>
+          <a:bodyPr rtlCol="0" anchor="ctr" wrap="square"/>
+          <a:lstStyle/>
+          <a:p>
+            <a:pPr algn="ctr"/>
+          </a:p>
+        </p:txBody>
+      </p:sp>
+      <p:sp>
+        <p:nvSpPr>
+          <p:cNvPr id="31" name="TextBox 30"/>
+          <p:cNvSpPr txBox="1"/>
+          <p:nvPr/>
+        </p:nvSpPr>
+        <p:spPr>
+          <a:xfrm>
+            <a:off x="10839450" y="4895850"/>
+            <a:ext cx="6210300" cy="647700"/>
+          </a:xfrm>
+          <a:prstGeom prst="rect">
+            <a:avLst/>
+          </a:prstGeom>
+          <a:noFill/>
+        </p:spPr>
+        <p:txBody>
+          <a:bodyPr wrap="square" lIns="0" rIns="0" tIns="0" bIns="0" anchor="ctr">
+            <a:spAutoFit/>
+          </a:bodyPr>
+          <a:lstStyle/>
+          <a:p>
+            <a:pPr algn="ctr">
+              <a:lnSpc>
+                <a:spcPct val="115000"/>
+              </a:lnSpc>
+            </a:pPr>
+            <a:r>
+              <a:rPr sz="1875" b="0">
+                <a:solidFill>
+                  <a:srgbClr val="3D3D3D"/>
+                </a:solidFill>
+                <a:latin typeface="Pretendard"/>
+                <a:ea typeface="Pretendard"/>
+                <a:cs typeface="Pretendard"/>
+              </a:rPr>
+              <a:t>명령은 터미널에서</a:t>
+            </a:r>
+          </a:p>
+        </p:txBody>
+      </p:sp>
+      <p:sp>
+        <p:nvSpPr>
+          <p:cNvPr id="32" name="TextBox 31"/>
+          <p:cNvSpPr txBox="1"/>
+          <p:nvPr/>
+        </p:nvSpPr>
+        <p:spPr>
+          <a:xfrm>
+            <a:off x="1143000" y="7620000"/>
+            <a:ext cx="16002000" cy="342900"/>
+          </a:xfrm>
+          <a:prstGeom prst="rect">
+            <a:avLst/>
+          </a:prstGeom>
+          <a:noFill/>
+        </p:spPr>
+        <p:txBody>
+          <a:bodyPr wrap="square" lIns="0" rIns="0" tIns="0" bIns="0" anchor="t">
+            <a:spAutoFit/>
+          </a:bodyPr>
+          <a:lstStyle/>
+          <a:p>
+            <a:pPr algn="l">
+              <a:lnSpc>
+                <a:spcPct val="100000"/>
+              </a:lnSpc>
+            </a:pPr>
+            <a:r>
+              <a:rPr sz="1875" b="1">
+                <a:solidFill>
+                  <a:srgbClr val="7D7D7D"/>
+                </a:solidFill>
+                <a:latin typeface="Pretendard"/>
+                <a:ea typeface="Pretendard"/>
+                <a:cs typeface="Pretendard"/>
+              </a:rPr>
+              <a:t>켠 뒤 pull pgsty/minio(216MB) · pgsty/mc(76.5MB) — Cannot connect 면 Docker 가 꺼진 것</a:t>
+            </a:r>
+          </a:p>
+        </p:txBody>
+      </p:sp>
+      <p:sp>
+        <p:nvSpPr>
+          <p:cNvPr id="33" name="Rectangle 32"/>
+          <p:cNvSpPr/>
+          <p:nvPr/>
+        </p:nvSpPr>
+        <p:spPr>
+          <a:xfrm>
+            <a:off x="1143000" y="8058150"/>
+            <a:ext cx="16002000" cy="9525"/>
+          </a:xfrm>
+          <a:prstGeom prst="rect">
+            <a:avLst/>
+          </a:prstGeom>
+          <a:solidFill>
+            <a:srgbClr val="DCE1E8"/>
+          </a:solidFill>
+          <a:ln>
+            <a:noFill/>
+          </a:ln>
+          <a:effectLst/>
+        </p:spPr>
+        <p:txBody>
+          <a:bodyPr rtlCol="0" anchor="ctr" wrap="square"/>
+          <a:lstStyle/>
+          <a:p>
+            <a:pPr algn="ctr"/>
+          </a:p>
+        </p:txBody>
+      </p:sp>
+      <p:sp>
+        <p:nvSpPr>
+          <p:cNvPr id="34" name="TextBox 33"/>
+          <p:cNvSpPr txBox="1"/>
+          <p:nvPr/>
+        </p:nvSpPr>
+        <p:spPr>
+          <a:xfrm>
+            <a:off x="1143000" y="8248650"/>
+            <a:ext cx="13335000" cy="323850"/>
+          </a:xfrm>
+          <a:prstGeom prst="rect">
+            <a:avLst/>
+          </a:prstGeom>
+          <a:noFill/>
+        </p:spPr>
+        <p:txBody>
+          <a:bodyPr wrap="square" lIns="0" rIns="0" tIns="0" bIns="0" anchor="t">
+            <a:spAutoFit/>
+          </a:bodyPr>
+          <a:lstStyle/>
+          <a:p>
+            <a:pPr algn="l">
+              <a:lnSpc>
+                <a:spcPct val="100000"/>
+              </a:lnSpc>
+            </a:pPr>
+            <a:r>
+              <a:rPr sz="1725" b="0">
+                <a:solidFill>
+                  <a:srgbClr val="7D7D7D"/>
+                </a:solidFill>
+                <a:latin typeface="Pretendard"/>
+                <a:ea typeface="Pretendard"/>
+                <a:cs typeface="Pretendard"/>
+              </a:rPr>
+              <a:t>데이터 엔지니어링 &amp; RAG 파이프라인 160H · 3-5 · 정리·회고 0.5H</a:t>
+            </a:r>
+          </a:p>
+        </p:txBody>
+      </p:sp>
+      <p:sp>
+        <p:nvSpPr>
+          <p:cNvPr id="35" name="TextBox 34"/>
+          <p:cNvSpPr txBox="1"/>
+          <p:nvPr/>
+        </p:nvSpPr>
+        <p:spPr>
+          <a:xfrm>
+            <a:off x="15240000" y="8248650"/>
+            <a:ext cx="1905000" cy="323850"/>
+          </a:xfrm>
+          <a:prstGeom prst="rect">
+            <a:avLst/>
+          </a:prstGeom>
+          <a:noFill/>
+        </p:spPr>
+        <p:txBody>
+          <a:bodyPr wrap="square" lIns="0" rIns="0" tIns="0" bIns="0" anchor="t">
+            <a:spAutoFit/>
+          </a:bodyPr>
+          <a:lstStyle/>
+          <a:p>
+            <a:pPr algn="r">
+              <a:lnSpc>
+                <a:spcPct val="100000"/>
+              </a:lnSpc>
+            </a:pPr>
+            <a:r>
+              <a:rPr sz="1725" b="0">
+                <a:solidFill>
+                  <a:srgbClr val="7D7D7D"/>
+                </a:solidFill>
+                <a:latin typeface="Pretendard"/>
+                <a:ea typeface="Pretendard"/>
+                <a:cs typeface="Pretendard"/>
+              </a:rPr>
+              <a:t>10</a:t>
+            </a:r>
+          </a:p>
+        </p:txBody>
+      </p:sp>
+    </p:spTree>
+  </p:cSld>
+  <p:clrMapOvr>
+    <a:masterClrMapping/>
+  </p:clrMapOvr>
+</p:sld>
+</file>
+
+<file path=ppt/slides/slide11.xml><?xml version="1.0" encoding="utf-8"?>
+<p:sld xmlns:a="http://schemas.openxmlformats.org/drawingml/2006/main" xmlns:p="http://schemas.openxmlformats.org/presentationml/2006/main" xmlns:r="http://schemas.openxmlformats.org/officeDocument/2006/relationships">
+  <p:cSld>
+    <p:spTree>
+      <p:nvGrpSpPr>
+        <p:cNvPr id="1" name=""/>
+        <p:cNvGrpSpPr/>
+        <p:nvPr/>
+      </p:nvGrpSpPr>
+      <p:grpSpPr/>
+      <p:sp>
+        <p:nvSpPr>
+          <p:cNvPr id="2" name="deckgen:decor"/>
           <p:cNvSpPr/>
           <p:nvPr/>
         </p:nvSpPr>
@@ -3629,7 +4927,7 @@
       </p:sp>
       <p:sp>
         <p:nvSpPr>
-          <p:cNvPr id="3" name="Oval 2"/>
+          <p:cNvPr id="3" name="deckgen:decor"/>
           <p:cNvSpPr/>
           <p:nvPr/>
         </p:nvSpPr>
@@ -4340,7 +5638,7 @@
                 <a:ea typeface="Pretendard"/>
                 <a:cs typeface="Pretendard"/>
               </a:rPr>
-              <a:t>준비할 것</a:t>
+              <a:t>오늘 밤</a:t>
             </a:r>
           </a:p>
         </p:txBody>
@@ -4381,7 +5679,7 @@
                 <a:ea typeface="Pretendard"/>
                 <a:cs typeface="Pretendard"/>
               </a:rPr>
-              <a:t>Docker Desktop · 9000·9001 포트 비우기</a:t>
+              <a:t>도커 켜기 · 이미지 두 개 받기</a:t>
             </a:r>
           </a:p>
         </p:txBody>
@@ -4406,7 +5704,7 @@
       <p:grpSpPr/>
       <p:sp>
         <p:nvSpPr>
-          <p:cNvPr id="2" name="Oval 1"/>
+          <p:cNvPr id="2" name="deckgen:decor"/>
           <p:cNvSpPr/>
           <p:nvPr/>
         </p:nvSpPr>
@@ -4436,7 +5734,7 @@
       </p:sp>
       <p:sp>
         <p:nvSpPr>
-          <p:cNvPr id="3" name="Oval 2"/>
+          <p:cNvPr id="3" name="deckgen:decor"/>
           <p:cNvSpPr/>
           <p:nvPr/>
         </p:nvSpPr>
@@ -4466,7 +5764,7 @@
       </p:sp>
       <p:sp>
         <p:nvSpPr>
-          <p:cNvPr id="4" name="Oval 3"/>
+          <p:cNvPr id="4" name="deckgen:decor"/>
           <p:cNvSpPr/>
           <p:nvPr/>
         </p:nvSpPr>
@@ -4893,7 +6191,7 @@
                 <a:ea typeface="Pretendard"/>
                 <a:cs typeface="Pretendard"/>
               </a:rPr>
-              <a:t>오늘의 체크리스트로 산출물 2종이 완성됐는지 점검한다</a:t>
+              <a:t>오늘의 체크리스트로 산출물 3종이 완성됐는지 점검한다</a:t>
             </a:r>
           </a:p>
         </p:txBody>
@@ -5397,7 +6695,7 @@
       <p:grpSpPr/>
       <p:sp>
         <p:nvSpPr>
-          <p:cNvPr id="2" name="Oval 1"/>
+          <p:cNvPr id="2" name="deckgen:decor"/>
           <p:cNvSpPr/>
           <p:nvPr/>
         </p:nvSpPr>
@@ -5427,7 +6725,7 @@
       </p:sp>
       <p:sp>
         <p:nvSpPr>
-          <p:cNvPr id="3" name="Oval 2"/>
+          <p:cNvPr id="3" name="deckgen:decor"/>
           <p:cNvSpPr/>
           <p:nvPr/>
         </p:nvSpPr>
@@ -5457,7 +6755,7 @@
       </p:sp>
       <p:sp>
         <p:nvSpPr>
-          <p:cNvPr id="4" name="Oval 3"/>
+          <p:cNvPr id="4" name="deckgen:decor"/>
           <p:cNvSpPr/>
           <p:nvPr/>
         </p:nvSpPr>
@@ -7180,7 +8478,7 @@
       <p:grpSpPr/>
       <p:sp>
         <p:nvSpPr>
-          <p:cNvPr id="2" name="Oval 1"/>
+          <p:cNvPr id="2" name="deckgen:decor"/>
           <p:cNvSpPr/>
           <p:nvPr/>
         </p:nvSpPr>
@@ -7210,7 +8508,7 @@
       </p:sp>
       <p:sp>
         <p:nvSpPr>
-          <p:cNvPr id="3" name="Oval 2"/>
+          <p:cNvPr id="3" name="deckgen:decor"/>
           <p:cNvSpPr/>
           <p:nvPr/>
         </p:nvSpPr>
@@ -7240,7 +8538,7 @@
       </p:sp>
       <p:sp>
         <p:nvSpPr>
-          <p:cNvPr id="4" name="Oval 3"/>
+          <p:cNvPr id="4" name="deckgen:decor"/>
           <p:cNvSpPr/>
           <p:nvPr/>
         </p:nvSpPr>
@@ -7446,7 +8744,7 @@
       </p:sp>
       <p:sp>
         <p:nvSpPr>
-          <p:cNvPr id="10" name="TextBox 9"/>
+          <p:cNvPr id="10" name="deckgen:ornament"/>
           <p:cNvSpPr txBox="1"/>
           <p:nvPr/>
         </p:nvSpPr>
@@ -7631,7 +8929,7 @@
       </p:sp>
       <p:sp>
         <p:nvSpPr>
-          <p:cNvPr id="14" name="TextBox 13"/>
+          <p:cNvPr id="14" name="deckgen:ornament"/>
           <p:cNvSpPr txBox="1"/>
           <p:nvPr/>
         </p:nvSpPr>
@@ -7816,7 +9114,7 @@
       </p:sp>
       <p:sp>
         <p:nvSpPr>
-          <p:cNvPr id="18" name="TextBox 17"/>
+          <p:cNvPr id="18" name="deckgen:ornament"/>
           <p:cNvSpPr txBox="1"/>
           <p:nvPr/>
         </p:nvSpPr>
@@ -8001,7 +9299,7 @@
       </p:sp>
       <p:sp>
         <p:nvSpPr>
-          <p:cNvPr id="22" name="TextBox 21"/>
+          <p:cNvPr id="22" name="deckgen:ornament"/>
           <p:cNvSpPr txBox="1"/>
           <p:nvPr/>
         </p:nvSpPr>
@@ -8186,7 +9484,7 @@
                 <a:ea typeface="Pretendard"/>
                 <a:cs typeface="Pretendard"/>
               </a:rPr>
-              <a:t>오늘까지 만든 Parquet 파일들이 레이크하우스 안에 그대로 들어간다</a:t>
+              <a:t>3주차 파일을 오브젝트 스토리지에 올려 보는 것은 4-1 심화 과제에서</a:t>
             </a:r>
           </a:p>
         </p:txBody>
@@ -8323,7 +9621,7 @@
       <p:grpSpPr/>
       <p:sp>
         <p:nvSpPr>
-          <p:cNvPr id="2" name="Oval 1"/>
+          <p:cNvPr id="2" name="deckgen:decor"/>
           <p:cNvSpPr/>
           <p:nvPr/>
         </p:nvSpPr>
@@ -8353,7 +9651,7 @@
       </p:sp>
       <p:sp>
         <p:nvSpPr>
-          <p:cNvPr id="3" name="Oval 2"/>
+          <p:cNvPr id="3" name="deckgen:decor"/>
           <p:cNvSpPr/>
           <p:nvPr/>
         </p:nvSpPr>
@@ -8383,7 +9681,7 @@
       </p:sp>
       <p:sp>
         <p:nvSpPr>
-          <p:cNvPr id="4" name="Oval 3"/>
+          <p:cNvPr id="4" name="deckgen:decor"/>
           <p:cNvSpPr/>
           <p:nvPr/>
         </p:nvSpPr>
@@ -9686,7 +10984,7 @@
                 <a:ea typeface="Pretendard"/>
                 <a:cs typeface="Pretendard"/>
               </a:rPr>
-              <a:t>지우고 재현되는지 확인한 뒤 산출물 2종을 제출했다</a:t>
+              <a:t>재현 확인 뒤 산출물 3종을 제출했다 (10-16 23:59)</a:t>
             </a:r>
           </a:p>
         </p:txBody>
@@ -9823,7 +11121,7 @@
       <p:grpSpPr/>
       <p:sp>
         <p:nvSpPr>
-          <p:cNvPr id="2" name="Oval 1"/>
+          <p:cNvPr id="2" name="deckgen:decor"/>
           <p:cNvSpPr/>
           <p:nvPr/>
         </p:nvSpPr>
@@ -9853,7 +11151,7 @@
       </p:sp>
       <p:sp>
         <p:nvSpPr>
-          <p:cNvPr id="3" name="Oval 2"/>
+          <p:cNvPr id="3" name="deckgen:decor"/>
           <p:cNvSpPr/>
           <p:nvPr/>
         </p:nvSpPr>
@@ -9883,7 +11181,7 @@
       </p:sp>
       <p:sp>
         <p:nvSpPr>
-          <p:cNvPr id="4" name="Oval 3"/>
+          <p:cNvPr id="4" name="deckgen:decor"/>
           <p:cNvSpPr/>
           <p:nvPr/>
         </p:nvSpPr>
@@ -11525,7 +12823,7 @@
       <p:grpSpPr/>
       <p:sp>
         <p:nvSpPr>
-          <p:cNvPr id="2" name="Oval 1"/>
+          <p:cNvPr id="2" name="deckgen:decor"/>
           <p:cNvSpPr/>
           <p:nvPr/>
         </p:nvSpPr>
@@ -11555,7 +12853,7 @@
       </p:sp>
       <p:sp>
         <p:nvSpPr>
-          <p:cNvPr id="3" name="Oval 2"/>
+          <p:cNvPr id="3" name="deckgen:decor"/>
           <p:cNvSpPr/>
           <p:nvPr/>
         </p:nvSpPr>
@@ -11585,7 +12883,7 @@
       </p:sp>
       <p:sp>
         <p:nvSpPr>
-          <p:cNvPr id="4" name="Oval 3"/>
+          <p:cNvPr id="4" name="deckgen:decor"/>
           <p:cNvSpPr/>
           <p:nvPr/>
         </p:nvSpPr>
@@ -12645,7 +13943,7 @@
       <p:grpSpPr/>
       <p:sp>
         <p:nvSpPr>
-          <p:cNvPr id="2" name="Oval 1"/>
+          <p:cNvPr id="2" name="deckgen:decor"/>
           <p:cNvSpPr/>
           <p:nvPr/>
         </p:nvSpPr>
@@ -12675,7 +13973,7 @@
       </p:sp>
       <p:sp>
         <p:nvSpPr>
-          <p:cNvPr id="3" name="Oval 2"/>
+          <p:cNvPr id="3" name="deckgen:decor"/>
           <p:cNvSpPr/>
           <p:nvPr/>
         </p:nvSpPr>
@@ -12705,7 +14003,7 @@
       </p:sp>
       <p:sp>
         <p:nvSpPr>
-          <p:cNvPr id="4" name="Oval 3"/>
+          <p:cNvPr id="4" name="deckgen:decor"/>
           <p:cNvSpPr/>
           <p:nvPr/>
         </p:nvSpPr>
@@ -12911,7 +14209,7 @@
       </p:sp>
       <p:sp>
         <p:nvSpPr>
-          <p:cNvPr id="10" name="TextBox 9"/>
+          <p:cNvPr id="10" name="deckgen:ornament"/>
           <p:cNvSpPr txBox="1"/>
           <p:nvPr/>
         </p:nvSpPr>
@@ -13096,7 +14394,7 @@
       </p:sp>
       <p:sp>
         <p:nvSpPr>
-          <p:cNvPr id="14" name="TextBox 13"/>
+          <p:cNvPr id="14" name="deckgen:ornament"/>
           <p:cNvSpPr txBox="1"/>
           <p:nvPr/>
         </p:nvSpPr>
@@ -13281,7 +14579,7 @@
       </p:sp>
       <p:sp>
         <p:nvSpPr>
-          <p:cNvPr id="18" name="TextBox 17"/>
+          <p:cNvPr id="18" name="deckgen:ornament"/>
           <p:cNvSpPr txBox="1"/>
           <p:nvPr/>
         </p:nvSpPr>
@@ -13466,7 +14764,7 @@
       </p:sp>
       <p:sp>
         <p:nvSpPr>
-          <p:cNvPr id="22" name="TextBox 21"/>
+          <p:cNvPr id="22" name="deckgen:ornament"/>
           <p:cNvSpPr txBox="1"/>
           <p:nvPr/>
         </p:nvSpPr>
@@ -13788,7 +15086,7 @@
       <p:grpSpPr/>
       <p:sp>
         <p:nvSpPr>
-          <p:cNvPr id="2" name="Oval 1"/>
+          <p:cNvPr id="2" name="deckgen:decor"/>
           <p:cNvSpPr/>
           <p:nvPr/>
         </p:nvSpPr>
@@ -13818,7 +15116,7 @@
       </p:sp>
       <p:sp>
         <p:nvSpPr>
-          <p:cNvPr id="3" name="Oval 2"/>
+          <p:cNvPr id="3" name="deckgen:decor"/>
           <p:cNvSpPr/>
           <p:nvPr/>
         </p:nvSpPr>
@@ -13848,7 +15146,7 @@
       </p:sp>
       <p:sp>
         <p:nvSpPr>
-          <p:cNvPr id="4" name="Oval 3"/>
+          <p:cNvPr id="4" name="deckgen:decor"/>
           <p:cNvSpPr/>
           <p:nvPr/>
         </p:nvSpPr>
@@ -14054,7 +15352,7 @@
       </p:sp>
       <p:sp>
         <p:nvSpPr>
-          <p:cNvPr id="10" name="TextBox 9"/>
+          <p:cNvPr id="10" name="deckgen:ornament"/>
           <p:cNvSpPr txBox="1"/>
           <p:nvPr/>
         </p:nvSpPr>
@@ -14239,7 +15537,7 @@
       </p:sp>
       <p:sp>
         <p:nvSpPr>
-          <p:cNvPr id="14" name="TextBox 13"/>
+          <p:cNvPr id="14" name="deckgen:ornament"/>
           <p:cNvSpPr txBox="1"/>
           <p:nvPr/>
         </p:nvSpPr>
@@ -14424,7 +15722,7 @@
       </p:sp>
       <p:sp>
         <p:nvSpPr>
-          <p:cNvPr id="18" name="TextBox 17"/>
+          <p:cNvPr id="18" name="deckgen:ornament"/>
           <p:cNvSpPr txBox="1"/>
           <p:nvPr/>
         </p:nvSpPr>
@@ -14609,7 +15907,7 @@
       </p:sp>
       <p:sp>
         <p:nvSpPr>
-          <p:cNvPr id="22" name="TextBox 21"/>
+          <p:cNvPr id="22" name="deckgen:ornament"/>
           <p:cNvSpPr txBox="1"/>
           <p:nvPr/>
         </p:nvSpPr>
@@ -14776,7 +16074,7 @@
                 <a:ea typeface="Pretendard"/>
                 <a:cs typeface="Pretendard"/>
               </a:rPr>
-              <a:t>준비: Docker Desktop 실행 · 9000(S3 API)·9001(웹 콘솔) 포트 비우기 · 실습 폴더 ~/lakehouse 만들기</a:t>
+              <a:t>내일 10-16(금) 19시 — 실습 폴더는 ~/lakehouse, 9000(S3 API)·9001(웹 콘솔) 포트를 쓴다</a:t>
             </a:r>
           </a:p>
         </p:txBody>
